--- a/slides/lezione3.pptx
+++ b/slides/lezione3.pptx
@@ -246,7 +246,7 @@
           <a:p>
             <a:fld id="{E39E4411-F617-6844-B543-1D0C1529BD09}" type="datetimeFigureOut">
               <a:rPr lang="en-US" smtClean="0"/>
-              <a:t>12/27/2025</a:t>
+              <a:t>1/7/26</a:t>
             </a:fld>
             <a:endParaRPr lang="en-US"/>
           </a:p>
@@ -404,7 +404,7 @@
           <a:p>
             <a:fld id="{D511362C-BAF5-F649-B307-735187DD2A6B}" type="slidenum">
               <a:rPr lang="en-US" smtClean="0"/>
-              <a:t>‹N›</a:t>
+              <a:t>‹#›</a:t>
             </a:fld>
             <a:endParaRPr lang="en-US"/>
           </a:p>
@@ -716,7 +716,7 @@
           <a:p>
             <a:fld id="{B7C12E76-5DE4-834B-BE10-AD31AA7B20EC}" type="slidenum">
               <a:rPr lang="en-US" smtClean="0"/>
-              <a:t>‹N›</a:t>
+              <a:t>‹#›</a:t>
             </a:fld>
             <a:endParaRPr lang="en-US"/>
           </a:p>
@@ -916,7 +916,7 @@
           <a:p>
             <a:fld id="{B7C12E76-5DE4-834B-BE10-AD31AA7B20EC}" type="slidenum">
               <a:rPr lang="en-US" smtClean="0"/>
-              <a:t>‹N›</a:t>
+              <a:t>‹#›</a:t>
             </a:fld>
             <a:endParaRPr lang="en-US"/>
           </a:p>
@@ -1126,7 +1126,7 @@
           <a:p>
             <a:fld id="{B7C12E76-5DE4-834B-BE10-AD31AA7B20EC}" type="slidenum">
               <a:rPr lang="en-US" smtClean="0"/>
-              <a:t>‹N›</a:t>
+              <a:t>‹#›</a:t>
             </a:fld>
             <a:endParaRPr lang="en-US"/>
           </a:p>
@@ -1326,7 +1326,7 @@
           <a:p>
             <a:fld id="{B7C12E76-5DE4-834B-BE10-AD31AA7B20EC}" type="slidenum">
               <a:rPr lang="en-US" smtClean="0"/>
-              <a:t>‹N›</a:t>
+              <a:t>‹#›</a:t>
             </a:fld>
             <a:endParaRPr lang="en-US"/>
           </a:p>
@@ -1603,7 +1603,7 @@
           <a:p>
             <a:fld id="{B7C12E76-5DE4-834B-BE10-AD31AA7B20EC}" type="slidenum">
               <a:rPr lang="en-US" smtClean="0"/>
-              <a:t>‹N›</a:t>
+              <a:t>‹#›</a:t>
             </a:fld>
             <a:endParaRPr lang="en-US"/>
           </a:p>
@@ -1870,7 +1870,7 @@
           <a:p>
             <a:fld id="{B7C12E76-5DE4-834B-BE10-AD31AA7B20EC}" type="slidenum">
               <a:rPr lang="en-US" smtClean="0"/>
-              <a:t>‹N›</a:t>
+              <a:t>‹#›</a:t>
             </a:fld>
             <a:endParaRPr lang="en-US"/>
           </a:p>
@@ -2284,7 +2284,7 @@
           <a:p>
             <a:fld id="{B7C12E76-5DE4-834B-BE10-AD31AA7B20EC}" type="slidenum">
               <a:rPr lang="en-US" smtClean="0"/>
-              <a:t>‹N›</a:t>
+              <a:t>‹#›</a:t>
             </a:fld>
             <a:endParaRPr lang="en-US"/>
           </a:p>
@@ -2427,7 +2427,7 @@
           <a:p>
             <a:fld id="{B7C12E76-5DE4-834B-BE10-AD31AA7B20EC}" type="slidenum">
               <a:rPr lang="en-US" smtClean="0"/>
-              <a:t>‹N›</a:t>
+              <a:t>‹#›</a:t>
             </a:fld>
             <a:endParaRPr lang="en-US"/>
           </a:p>
@@ -2542,7 +2542,7 @@
           <a:p>
             <a:fld id="{B7C12E76-5DE4-834B-BE10-AD31AA7B20EC}" type="slidenum">
               <a:rPr lang="en-US" smtClean="0"/>
-              <a:t>‹N›</a:t>
+              <a:t>‹#›</a:t>
             </a:fld>
             <a:endParaRPr lang="en-US"/>
           </a:p>
@@ -2855,7 +2855,7 @@
           <a:p>
             <a:fld id="{B7C12E76-5DE4-834B-BE10-AD31AA7B20EC}" type="slidenum">
               <a:rPr lang="en-US" smtClean="0"/>
-              <a:t>‹N›</a:t>
+              <a:t>‹#›</a:t>
             </a:fld>
             <a:endParaRPr lang="en-US"/>
           </a:p>
@@ -3148,7 +3148,7 @@
           <a:p>
             <a:fld id="{B7C12E76-5DE4-834B-BE10-AD31AA7B20EC}" type="slidenum">
               <a:rPr lang="en-US" smtClean="0"/>
-              <a:t>‹N›</a:t>
+              <a:t>‹#›</a:t>
             </a:fld>
             <a:endParaRPr lang="en-US"/>
           </a:p>
@@ -3429,7 +3429,7 @@
           <a:p>
             <a:fld id="{B7C12E76-5DE4-834B-BE10-AD31AA7B20EC}" type="slidenum">
               <a:rPr lang="en-US" smtClean="0"/>
-              <a:t>‹N›</a:t>
+              <a:t>‹#›</a:t>
             </a:fld>
             <a:endParaRPr lang="en-US"/>
           </a:p>

--- a/slides/lezione3.pptx
+++ b/slides/lezione3.pptx
@@ -5,7 +5,7 @@
     <p:sldMasterId id="2147483648" r:id="rId1"/>
   </p:sldMasterIdLst>
   <p:notesMasterIdLst>
-    <p:notesMasterId r:id="rId52"/>
+    <p:notesMasterId r:id="rId53"/>
   </p:notesMasterIdLst>
   <p:sldIdLst>
     <p:sldId id="256" r:id="rId2"/>
@@ -58,6 +58,7 @@
     <p:sldId id="309" r:id="rId49"/>
     <p:sldId id="311" r:id="rId50"/>
     <p:sldId id="312" r:id="rId51"/>
+    <p:sldId id="314" r:id="rId52"/>
   </p:sldIdLst>
   <p:sldSz cx="12192000" cy="6858000"/>
   <p:notesSz cx="6858000" cy="9144000"/>
@@ -246,7 +247,7 @@
           <a:p>
             <a:fld id="{E39E4411-F617-6844-B543-1D0C1529BD09}" type="datetimeFigureOut">
               <a:rPr lang="en-US" smtClean="0"/>
-              <a:t>1/7/26</a:t>
+              <a:t>1/13/26</a:t>
             </a:fld>
             <a:endParaRPr lang="en-US"/>
           </a:p>
@@ -15000,7 +15001,7 @@
 </file>
 
 <file path=ppt/slides/slide42.xml><?xml version="1.0" encoding="utf-8"?>
-<p:sld xmlns:a="http://schemas.openxmlformats.org/drawingml/2006/main" xmlns:r="http://schemas.openxmlformats.org/officeDocument/2006/relationships" xmlns:p="http://schemas.openxmlformats.org/presentationml/2006/main">
+<p:sld xmlns:a="http://schemas.openxmlformats.org/drawingml/2006/main" xmlns:r="http://schemas.openxmlformats.org/officeDocument/2006/relationships" xmlns:p="http://schemas.openxmlformats.org/presentationml/2006/main" show="0">
   <p:cSld>
     <p:spTree>
       <p:nvGrpSpPr>
@@ -16619,6 +16620,81 @@
           </a:prstGeom>
         </p:spPr>
       </p:pic>
+      <p:sp>
+        <p:nvSpPr>
+          <p:cNvPr id="8" name="TextBox 7">
+            <a:extLst>
+              <a:ext uri="{FF2B5EF4-FFF2-40B4-BE49-F238E27FC236}">
+                <a16:creationId xmlns:a16="http://schemas.microsoft.com/office/drawing/2014/main" id="{16909635-658E-6A90-8A21-8A87A5ED6CEF}"/>
+              </a:ext>
+            </a:extLst>
+          </p:cNvPr>
+          <p:cNvSpPr txBox="1"/>
+          <p:nvPr/>
+        </p:nvSpPr>
+        <p:spPr>
+          <a:xfrm>
+            <a:off x="2117167" y="1739499"/>
+            <a:ext cx="8525436" cy="923330"/>
+          </a:xfrm>
+          <a:prstGeom prst="rect">
+            <a:avLst/>
+          </a:prstGeom>
+          <a:noFill/>
+        </p:spPr>
+        <p:txBody>
+          <a:bodyPr wrap="square">
+            <a:spAutoFit/>
+          </a:bodyPr>
+          <a:lstStyle/>
+          <a:p>
+            <a:pPr marL="285750" indent="-285750">
+              <a:buFont typeface="Arial" panose="020B0604020202020204" pitchFamily="34" charset="0"/>
+              <a:buChar char="•"/>
+            </a:pPr>
+            <a:r>
+              <a:rPr lang="en-US" dirty="0"/>
+              <a:t>A </a:t>
+            </a:r>
+            <a:r>
+              <a:rPr lang="en-US" b="1" dirty="0"/>
+              <a:t>concurrent conditional assignment</a:t>
+            </a:r>
+            <a:r>
+              <a:rPr lang="en-US" dirty="0"/>
+              <a:t> used outside processes.</a:t>
+            </a:r>
+          </a:p>
+          <a:p>
+            <a:pPr marL="285750" indent="-285750">
+              <a:buFont typeface="Arial" panose="020B0604020202020204" pitchFamily="34" charset="0"/>
+              <a:buChar char="•"/>
+            </a:pPr>
+            <a:r>
+              <a:rPr lang="en-US" dirty="0"/>
+              <a:t>Evaluates conditions in order and assigns the first matching value.</a:t>
+            </a:r>
+          </a:p>
+          <a:p>
+            <a:pPr marL="285750" indent="-285750">
+              <a:buFont typeface="Arial" panose="020B0604020202020204" pitchFamily="34" charset="0"/>
+              <a:buChar char="•"/>
+            </a:pPr>
+            <a:r>
+              <a:rPr lang="en-US" dirty="0"/>
+              <a:t>Commonly used for </a:t>
+            </a:r>
+            <a:r>
+              <a:rPr lang="en-US" b="1" dirty="0"/>
+              <a:t>simple combinational logic</a:t>
+            </a:r>
+            <a:r>
+              <a:rPr lang="en-US" dirty="0"/>
+              <a:t> and multiplexers.</a:t>
+            </a:r>
+          </a:p>
+        </p:txBody>
+      </p:sp>
     </p:spTree>
     <p:extLst>
       <p:ext uri="{BB962C8B-B14F-4D97-AF65-F5344CB8AC3E}">
@@ -17059,6 +17135,14 @@
             </a:r>
             <a:r>
               <a:rPr lang="it-IT" dirty="0"/>
+              <a:t>/</a:t>
+            </a:r>
+            <a:r>
+              <a:rPr lang="it-IT" dirty="0" err="1"/>
+              <a:t>elsif</a:t>
+            </a:r>
+            <a:r>
+              <a:rPr lang="it-IT" dirty="0"/>
               <a:t>/else </a:t>
             </a:r>
             <a:r>
@@ -17176,7 +17260,7 @@
         </p:blipFill>
         <p:spPr>
           <a:xfrm>
-            <a:off x="7400588" y="867103"/>
+            <a:off x="7597812" y="1473297"/>
             <a:ext cx="3740830" cy="4595089"/>
           </a:xfrm>
           <a:prstGeom prst="rect">
@@ -17184,6 +17268,89 @@
           </a:prstGeom>
         </p:spPr>
       </p:pic>
+      <p:sp>
+        <p:nvSpPr>
+          <p:cNvPr id="8" name="TextBox 7">
+            <a:extLst>
+              <a:ext uri="{FF2B5EF4-FFF2-40B4-BE49-F238E27FC236}">
+                <a16:creationId xmlns:a16="http://schemas.microsoft.com/office/drawing/2014/main" id="{687C51F9-8228-9F2E-347F-3D9CFC0F006F}"/>
+              </a:ext>
+            </a:extLst>
+          </p:cNvPr>
+          <p:cNvSpPr txBox="1"/>
+          <p:nvPr/>
+        </p:nvSpPr>
+        <p:spPr>
+          <a:xfrm>
+            <a:off x="531581" y="1473297"/>
+            <a:ext cx="6112764" cy="1200329"/>
+          </a:xfrm>
+          <a:prstGeom prst="rect">
+            <a:avLst/>
+          </a:prstGeom>
+          <a:noFill/>
+        </p:spPr>
+        <p:txBody>
+          <a:bodyPr wrap="square">
+            <a:spAutoFit/>
+          </a:bodyPr>
+          <a:lstStyle/>
+          <a:p>
+            <a:pPr marL="285750" indent="-285750">
+              <a:buFont typeface="Arial" panose="020B0604020202020204" pitchFamily="34" charset="0"/>
+              <a:buChar char="•"/>
+            </a:pPr>
+            <a:r>
+              <a:rPr lang="en-US" dirty="0"/>
+              <a:t>Used for conditional decisions with </a:t>
+            </a:r>
+            <a:r>
+              <a:rPr lang="en-US" b="1" dirty="0"/>
+              <a:t>priority</a:t>
+            </a:r>
+            <a:r>
+              <a:rPr lang="en-US" dirty="0"/>
+              <a:t>.</a:t>
+            </a:r>
+          </a:p>
+          <a:p>
+            <a:pPr marL="285750" indent="-285750">
+              <a:buFont typeface="Arial" panose="020B0604020202020204" pitchFamily="34" charset="0"/>
+              <a:buChar char="•"/>
+            </a:pPr>
+            <a:r>
+              <a:rPr lang="en-US" dirty="0"/>
+              <a:t>Conditions are evaluated </a:t>
+            </a:r>
+            <a:r>
+              <a:rPr lang="en-US" b="1" dirty="0"/>
+              <a:t>top-to-bottom</a:t>
+            </a:r>
+            <a:r>
+              <a:rPr lang="en-US" dirty="0"/>
+              <a:t>, and the first true condition is executed.</a:t>
+            </a:r>
+          </a:p>
+          <a:p>
+            <a:pPr marL="285750" indent="-285750">
+              <a:buFont typeface="Arial" panose="020B0604020202020204" pitchFamily="34" charset="0"/>
+              <a:buChar char="•"/>
+            </a:pPr>
+            <a:r>
+              <a:rPr lang="en-US" dirty="0"/>
+              <a:t>Commonly used in </a:t>
+            </a:r>
+            <a:r>
+              <a:rPr lang="en-US" b="1" dirty="0"/>
+              <a:t>clocked logic</a:t>
+            </a:r>
+            <a:r>
+              <a:rPr lang="en-US" dirty="0"/>
+              <a:t> and control paths.</a:t>
+            </a:r>
+          </a:p>
+        </p:txBody>
+      </p:sp>
     </p:spTree>
     <p:extLst>
       <p:ext uri="{BB962C8B-B14F-4D97-AF65-F5344CB8AC3E}">
@@ -17624,10 +17791,347 @@
           </a:prstGeom>
         </p:spPr>
       </p:pic>
+      <p:sp>
+        <p:nvSpPr>
+          <p:cNvPr id="8" name="TextBox 7">
+            <a:extLst>
+              <a:ext uri="{FF2B5EF4-FFF2-40B4-BE49-F238E27FC236}">
+                <a16:creationId xmlns:a16="http://schemas.microsoft.com/office/drawing/2014/main" id="{A66A1BF9-1E7E-8E7C-658A-9F0E8B831DFC}"/>
+              </a:ext>
+            </a:extLst>
+          </p:cNvPr>
+          <p:cNvSpPr txBox="1"/>
+          <p:nvPr/>
+        </p:nvSpPr>
+        <p:spPr>
+          <a:xfrm>
+            <a:off x="379415" y="1185334"/>
+            <a:ext cx="6730995" cy="1200329"/>
+          </a:xfrm>
+          <a:prstGeom prst="rect">
+            <a:avLst/>
+          </a:prstGeom>
+          <a:noFill/>
+        </p:spPr>
+        <p:txBody>
+          <a:bodyPr wrap="square">
+            <a:spAutoFit/>
+          </a:bodyPr>
+          <a:lstStyle/>
+          <a:p>
+            <a:pPr marL="285750" indent="-285750">
+              <a:buFont typeface="Arial" panose="020B0604020202020204" pitchFamily="34" charset="0"/>
+              <a:buChar char="•"/>
+            </a:pPr>
+            <a:r>
+              <a:rPr lang="en-US" dirty="0"/>
+              <a:t>Used for selecting </a:t>
+            </a:r>
+            <a:r>
+              <a:rPr lang="en-US" b="1" dirty="0"/>
+              <a:t>one of many mutually exclusive options</a:t>
+            </a:r>
+            <a:r>
+              <a:rPr lang="en-US" dirty="0"/>
+              <a:t>.</a:t>
+            </a:r>
+          </a:p>
+          <a:p>
+            <a:pPr marL="285750" indent="-285750">
+              <a:buFont typeface="Arial" panose="020B0604020202020204" pitchFamily="34" charset="0"/>
+              <a:buChar char="•"/>
+            </a:pPr>
+            <a:r>
+              <a:rPr lang="en-US" dirty="0"/>
+              <a:t>All choices are evaluated in parallel, </a:t>
+            </a:r>
+            <a:r>
+              <a:rPr lang="en-US" b="1" dirty="0"/>
+              <a:t>no priority</a:t>
+            </a:r>
+            <a:r>
+              <a:rPr lang="en-US" dirty="0"/>
+              <a:t> between branches.</a:t>
+            </a:r>
+          </a:p>
+          <a:p>
+            <a:pPr marL="285750" indent="-285750">
+              <a:buFont typeface="Arial" panose="020B0604020202020204" pitchFamily="34" charset="0"/>
+              <a:buChar char="•"/>
+            </a:pPr>
+            <a:r>
+              <a:rPr lang="en-US" dirty="0"/>
+              <a:t>Ideal for </a:t>
+            </a:r>
+            <a:r>
+              <a:rPr lang="en-US" b="1" dirty="0"/>
+              <a:t>state machines</a:t>
+            </a:r>
+            <a:r>
+              <a:rPr lang="en-US" dirty="0"/>
+              <a:t> and multiplexers..</a:t>
+            </a:r>
+          </a:p>
+        </p:txBody>
+      </p:sp>
     </p:spTree>
     <p:extLst>
       <p:ext uri="{BB962C8B-B14F-4D97-AF65-F5344CB8AC3E}">
         <p14:creationId xmlns:p14="http://schemas.microsoft.com/office/powerpoint/2010/main" val="3435224948"/>
+      </p:ext>
+    </p:extLst>
+  </p:cSld>
+  <p:clrMapOvr>
+    <a:masterClrMapping/>
+  </p:clrMapOvr>
+</p:sld>
+</file>
+
+<file path=ppt/slides/slide51.xml><?xml version="1.0" encoding="utf-8"?>
+<p:sld xmlns:a="http://schemas.openxmlformats.org/drawingml/2006/main" xmlns:r="http://schemas.openxmlformats.org/officeDocument/2006/relationships" xmlns:p="http://schemas.openxmlformats.org/presentationml/2006/main">
+  <p:cSld>
+    <p:spTree>
+      <p:nvGrpSpPr>
+        <p:cNvPr id="1" name=""/>
+        <p:cNvGrpSpPr/>
+        <p:nvPr/>
+      </p:nvGrpSpPr>
+      <p:grpSpPr>
+        <a:xfrm>
+          <a:off x="0" y="0"/>
+          <a:ext cx="0" cy="0"/>
+          <a:chOff x="0" y="0"/>
+          <a:chExt cx="0" cy="0"/>
+        </a:xfrm>
+      </p:grpSpPr>
+      <p:sp>
+        <p:nvSpPr>
+          <p:cNvPr id="2" name="Title 1">
+            <a:extLst>
+              <a:ext uri="{FF2B5EF4-FFF2-40B4-BE49-F238E27FC236}">
+                <a16:creationId xmlns:a16="http://schemas.microsoft.com/office/drawing/2014/main" id="{AC25BA26-FDF5-6DE2-84E4-AAD50FDA3DB9}"/>
+              </a:ext>
+            </a:extLst>
+          </p:cNvPr>
+          <p:cNvSpPr>
+            <a:spLocks noGrp="1"/>
+          </p:cNvSpPr>
+          <p:nvPr>
+            <p:ph type="title"/>
+          </p:nvPr>
+        </p:nvSpPr>
+        <p:spPr/>
+        <p:txBody>
+          <a:bodyPr/>
+          <a:lstStyle/>
+          <a:p>
+            <a:r>
+              <a:rPr lang="en-US" dirty="0"/>
+              <a:t>For loop </a:t>
+            </a:r>
+            <a:r>
+              <a:rPr lang="it-IT" dirty="0" err="1"/>
+              <a:t>statement</a:t>
+            </a:r>
+            <a:endParaRPr lang="en-US" dirty="0"/>
+          </a:p>
+        </p:txBody>
+      </p:sp>
+      <p:sp>
+        <p:nvSpPr>
+          <p:cNvPr id="3" name="Date Placeholder 2">
+            <a:extLst>
+              <a:ext uri="{FF2B5EF4-FFF2-40B4-BE49-F238E27FC236}">
+                <a16:creationId xmlns:a16="http://schemas.microsoft.com/office/drawing/2014/main" id="{9EF900EF-AD42-309F-C0F4-43A05440AAEC}"/>
+              </a:ext>
+            </a:extLst>
+          </p:cNvPr>
+          <p:cNvSpPr>
+            <a:spLocks noGrp="1"/>
+          </p:cNvSpPr>
+          <p:nvPr>
+            <p:ph type="dt" sz="half" idx="10"/>
+          </p:nvPr>
+        </p:nvSpPr>
+        <p:spPr/>
+        <p:txBody>
+          <a:bodyPr/>
+          <a:lstStyle/>
+          <a:p>
+            <a:r>
+              <a:rPr lang="en-US"/>
+              <a:t>19/01/2026</a:t>
+            </a:r>
+          </a:p>
+        </p:txBody>
+      </p:sp>
+      <p:sp>
+        <p:nvSpPr>
+          <p:cNvPr id="4" name="Footer Placeholder 3">
+            <a:extLst>
+              <a:ext uri="{FF2B5EF4-FFF2-40B4-BE49-F238E27FC236}">
+                <a16:creationId xmlns:a16="http://schemas.microsoft.com/office/drawing/2014/main" id="{78A88E00-8039-94B0-5CE2-35110E7612C0}"/>
+              </a:ext>
+            </a:extLst>
+          </p:cNvPr>
+          <p:cNvSpPr>
+            <a:spLocks noGrp="1"/>
+          </p:cNvSpPr>
+          <p:nvPr>
+            <p:ph type="ftr" sz="quarter" idx="11"/>
+          </p:nvPr>
+        </p:nvSpPr>
+        <p:spPr/>
+        <p:txBody>
+          <a:bodyPr/>
+          <a:lstStyle/>
+          <a:p>
+            <a:r>
+              <a:rPr lang="en-US"/>
+              <a:t>Stefan Cristi Zugravel, elettronica base, TPS lezione 3</a:t>
+            </a:r>
+          </a:p>
+        </p:txBody>
+      </p:sp>
+      <p:sp>
+        <p:nvSpPr>
+          <p:cNvPr id="5" name="Slide Number Placeholder 4">
+            <a:extLst>
+              <a:ext uri="{FF2B5EF4-FFF2-40B4-BE49-F238E27FC236}">
+                <a16:creationId xmlns:a16="http://schemas.microsoft.com/office/drawing/2014/main" id="{9E632CF2-4538-F1C2-44D7-B49550F547FC}"/>
+              </a:ext>
+            </a:extLst>
+          </p:cNvPr>
+          <p:cNvSpPr>
+            <a:spLocks noGrp="1"/>
+          </p:cNvSpPr>
+          <p:nvPr>
+            <p:ph type="sldNum" sz="quarter" idx="12"/>
+          </p:nvPr>
+        </p:nvSpPr>
+        <p:spPr/>
+        <p:txBody>
+          <a:bodyPr/>
+          <a:lstStyle/>
+          <a:p>
+            <a:fld id="{B7C12E76-5DE4-834B-BE10-AD31AA7B20EC}" type="slidenum">
+              <a:rPr lang="en-US" smtClean="0"/>
+              <a:t>51</a:t>
+            </a:fld>
+            <a:endParaRPr lang="en-US"/>
+          </a:p>
+        </p:txBody>
+      </p:sp>
+      <p:pic>
+        <p:nvPicPr>
+          <p:cNvPr id="7" name="Picture 6" descr="A screen shot of a computer code&#10;&#10;AI-generated content may be incorrect.">
+            <a:extLst>
+              <a:ext uri="{FF2B5EF4-FFF2-40B4-BE49-F238E27FC236}">
+                <a16:creationId xmlns:a16="http://schemas.microsoft.com/office/drawing/2014/main" id="{55AFBFE6-1081-B6F7-7292-2D47F3741A65}"/>
+              </a:ext>
+            </a:extLst>
+          </p:cNvPr>
+          <p:cNvPicPr>
+            <a:picLocks noChangeAspect="1"/>
+          </p:cNvPicPr>
+          <p:nvPr/>
+        </p:nvPicPr>
+        <p:blipFill>
+          <a:blip r:embed="rId2"/>
+          <a:srcRect r="10896"/>
+          <a:stretch>
+            <a:fillRect/>
+          </a:stretch>
+        </p:blipFill>
+        <p:spPr>
+          <a:xfrm>
+            <a:off x="6479242" y="1670505"/>
+            <a:ext cx="5534960" cy="3516989"/>
+          </a:xfrm>
+          <a:prstGeom prst="rect">
+            <a:avLst/>
+          </a:prstGeom>
+        </p:spPr>
+      </p:pic>
+      <p:sp>
+        <p:nvSpPr>
+          <p:cNvPr id="9" name="TextBox 8">
+            <a:extLst>
+              <a:ext uri="{FF2B5EF4-FFF2-40B4-BE49-F238E27FC236}">
+                <a16:creationId xmlns:a16="http://schemas.microsoft.com/office/drawing/2014/main" id="{F2DB35B5-6EBA-F1BB-EC56-3FF6FDA15B8D}"/>
+              </a:ext>
+            </a:extLst>
+          </p:cNvPr>
+          <p:cNvSpPr txBox="1"/>
+          <p:nvPr/>
+        </p:nvSpPr>
+        <p:spPr>
+          <a:xfrm>
+            <a:off x="242044" y="1670505"/>
+            <a:ext cx="6113928" cy="923330"/>
+          </a:xfrm>
+          <a:prstGeom prst="rect">
+            <a:avLst/>
+          </a:prstGeom>
+          <a:noFill/>
+        </p:spPr>
+        <p:txBody>
+          <a:bodyPr wrap="square">
+            <a:spAutoFit/>
+          </a:bodyPr>
+          <a:lstStyle/>
+          <a:p>
+            <a:pPr marL="285750" indent="-285750">
+              <a:buFont typeface="Arial" panose="020B0604020202020204" pitchFamily="34" charset="0"/>
+              <a:buChar char="•"/>
+            </a:pPr>
+            <a:r>
+              <a:rPr lang="en-US" dirty="0"/>
+              <a:t>Repeats a set of sequential statements for a fixed range.</a:t>
+            </a:r>
+          </a:p>
+          <a:p>
+            <a:pPr marL="285750" indent="-285750">
+              <a:buFont typeface="Arial" panose="020B0604020202020204" pitchFamily="34" charset="0"/>
+              <a:buChar char="•"/>
+            </a:pPr>
+            <a:r>
+              <a:rPr lang="en-US" dirty="0"/>
+              <a:t>Used for </a:t>
+            </a:r>
+            <a:r>
+              <a:rPr lang="en-US" b="1" dirty="0"/>
+              <a:t>iterating over arrays or buses</a:t>
+            </a:r>
+            <a:r>
+              <a:rPr lang="en-US" dirty="0"/>
+              <a:t>.</a:t>
+            </a:r>
+          </a:p>
+          <a:p>
+            <a:pPr marL="285750" indent="-285750">
+              <a:buFont typeface="Arial" panose="020B0604020202020204" pitchFamily="34" charset="0"/>
+              <a:buChar char="•"/>
+            </a:pPr>
+            <a:r>
+              <a:rPr lang="en-US" dirty="0"/>
+              <a:t>Loops are </a:t>
+            </a:r>
+            <a:r>
+              <a:rPr lang="en-US" b="1" dirty="0"/>
+              <a:t>unrolled in hardware</a:t>
+            </a:r>
+            <a:r>
+              <a:rPr lang="en-US" dirty="0"/>
+              <a:t>, not executed over time.</a:t>
+            </a:r>
+          </a:p>
+        </p:txBody>
+      </p:sp>
+    </p:spTree>
+    <p:extLst>
+      <p:ext uri="{BB962C8B-B14F-4D97-AF65-F5344CB8AC3E}">
+        <p14:creationId xmlns:p14="http://schemas.microsoft.com/office/powerpoint/2010/main" val="4257908755"/>
       </p:ext>
     </p:extLst>
   </p:cSld>
